--- a/CNN_ViT_CvT_Differences.pptx
+++ b/CNN_ViT_CvT_Differences.pptx
@@ -9,17 +9,18 @@
     <p:sldId id="256" r:id="rId3"/>
     <p:sldId id="257" r:id="rId4"/>
     <p:sldId id="258" r:id="rId5"/>
-    <p:sldId id="259" r:id="rId6"/>
-    <p:sldId id="260" r:id="rId7"/>
-    <p:sldId id="262" r:id="rId8"/>
-    <p:sldId id="271" r:id="rId9"/>
-    <p:sldId id="272" r:id="rId10"/>
-    <p:sldId id="261" r:id="rId11"/>
-    <p:sldId id="264" r:id="rId12"/>
-    <p:sldId id="265" r:id="rId13"/>
-    <p:sldId id="266" r:id="rId14"/>
-    <p:sldId id="270" r:id="rId15"/>
-    <p:sldId id="268" r:id="rId16"/>
+    <p:sldId id="273" r:id="rId6"/>
+    <p:sldId id="259" r:id="rId7"/>
+    <p:sldId id="260" r:id="rId8"/>
+    <p:sldId id="262" r:id="rId9"/>
+    <p:sldId id="271" r:id="rId10"/>
+    <p:sldId id="272" r:id="rId11"/>
+    <p:sldId id="261" r:id="rId12"/>
+    <p:sldId id="264" r:id="rId13"/>
+    <p:sldId id="265" r:id="rId14"/>
+    <p:sldId id="266" r:id="rId15"/>
+    <p:sldId id="270" r:id="rId16"/>
+    <p:sldId id="268" r:id="rId17"/>
   </p:sldIdLst>
   <p:sldSz cx="9144000" cy="6858000" type="screen4x3"/>
   <p:notesSz cx="6858000" cy="9144000"/>
@@ -140,7 +141,7 @@
 <file path=ppt/revisionInfo.xml><?xml version="1.0" encoding="utf-8"?>
 <p1510:revInfo xmlns:a="http://schemas.openxmlformats.org/drawingml/2006/main" xmlns:r="http://schemas.openxmlformats.org/officeDocument/2006/relationships" xmlns:p1510="http://schemas.microsoft.com/office/powerpoint/2015/10/main">
   <p1510:revLst>
-    <p1510:client id="{162BD4D9-EA8B-4608-A82B-F06470FB6D0A}" v="44" dt="2025-12-12T13:29:19.546"/>
+    <p1510:client id="{162BD4D9-EA8B-4608-A82B-F06470FB6D0A}" v="47" dt="2025-12-13T16:30:33.609"/>
   </p1510:revLst>
 </p1510:revInfo>
 </file>
@@ -149,8 +150,8 @@
 <pc:chgInfo xmlns:a="http://schemas.openxmlformats.org/drawingml/2006/main" xmlns:r="http://schemas.openxmlformats.org/officeDocument/2006/relationships" xmlns:ac="http://schemas.microsoft.com/office/drawing/2013/main/command" xmlns:pc="http://schemas.microsoft.com/office/powerpoint/2013/main/command">
   <pc:docChgLst>
     <pc:chgData name="Nishit M.V" userId="08cbca556c6700c9" providerId="LiveId" clId="{11D13D3E-C88F-41F9-9524-E8908C59F562}"/>
-    <pc:docChg chg="undo custSel addSld modSld">
-      <pc:chgData name="Nishit M.V" userId="08cbca556c6700c9" providerId="LiveId" clId="{11D13D3E-C88F-41F9-9524-E8908C59F562}" dt="2025-12-12T13:30:38.553" v="1161" actId="1076"/>
+    <pc:docChg chg="undo custSel addSld modSld sldOrd">
+      <pc:chgData name="Nishit M.V" userId="08cbca556c6700c9" providerId="LiveId" clId="{11D13D3E-C88F-41F9-9524-E8908C59F562}" dt="2025-12-13T17:11:00.900" v="1804" actId="20577"/>
       <pc:docMkLst>
         <pc:docMk/>
       </pc:docMkLst>
@@ -327,7 +328,7 @@
         </pc:spChg>
       </pc:sldChg>
       <pc:sldChg chg="modSp new mod">
-        <pc:chgData name="Nishit M.V" userId="08cbca556c6700c9" providerId="LiveId" clId="{11D13D3E-C88F-41F9-9524-E8908C59F562}" dt="2025-12-12T13:30:18.616" v="1159" actId="20577"/>
+        <pc:chgData name="Nishit M.V" userId="08cbca556c6700c9" providerId="LiveId" clId="{11D13D3E-C88F-41F9-9524-E8908C59F562}" dt="2025-12-13T16:32:29.417" v="1367" actId="20577"/>
         <pc:sldMkLst>
           <pc:docMk/>
           <pc:sldMk cId="1698819724" sldId="270"/>
@@ -341,7 +342,7 @@
           </ac:spMkLst>
         </pc:spChg>
         <pc:spChg chg="mod">
-          <ac:chgData name="Nishit M.V" userId="08cbca556c6700c9" providerId="LiveId" clId="{11D13D3E-C88F-41F9-9524-E8908C59F562}" dt="2025-12-12T13:30:18.616" v="1159" actId="20577"/>
+          <ac:chgData name="Nishit M.V" userId="08cbca556c6700c9" providerId="LiveId" clId="{11D13D3E-C88F-41F9-9524-E8908C59F562}" dt="2025-12-13T16:32:29.417" v="1367" actId="20577"/>
           <ac:spMkLst>
             <pc:docMk/>
             <pc:sldMk cId="1698819724" sldId="270"/>
@@ -350,13 +351,13 @@
         </pc:spChg>
       </pc:sldChg>
       <pc:sldChg chg="addSp delSp modSp new mod">
-        <pc:chgData name="Nishit M.V" userId="08cbca556c6700c9" providerId="LiveId" clId="{11D13D3E-C88F-41F9-9524-E8908C59F562}" dt="2025-12-12T13:30:38.553" v="1161" actId="1076"/>
+        <pc:chgData name="Nishit M.V" userId="08cbca556c6700c9" providerId="LiveId" clId="{11D13D3E-C88F-41F9-9524-E8908C59F562}" dt="2025-12-13T16:28:39.287" v="1305" actId="1076"/>
         <pc:sldMkLst>
           <pc:docMk/>
           <pc:sldMk cId="2785847948" sldId="271"/>
         </pc:sldMkLst>
         <pc:spChg chg="mod">
-          <ac:chgData name="Nishit M.V" userId="08cbca556c6700c9" providerId="LiveId" clId="{11D13D3E-C88F-41F9-9524-E8908C59F562}" dt="2025-12-12T13:29:02.231" v="1115" actId="20577"/>
+          <ac:chgData name="Nishit M.V" userId="08cbca556c6700c9" providerId="LiveId" clId="{11D13D3E-C88F-41F9-9524-E8908C59F562}" dt="2025-12-13T16:28:39.287" v="1305" actId="1076"/>
           <ac:spMkLst>
             <pc:docMk/>
             <pc:sldMk cId="2785847948" sldId="271"/>
@@ -372,7 +373,7 @@
           </ac:spMkLst>
         </pc:spChg>
         <pc:picChg chg="add mod">
-          <ac:chgData name="Nishit M.V" userId="08cbca556c6700c9" providerId="LiveId" clId="{11D13D3E-C88F-41F9-9524-E8908C59F562}" dt="2025-12-12T13:29:31.711" v="1123" actId="14100"/>
+          <ac:chgData name="Nishit M.V" userId="08cbca556c6700c9" providerId="LiveId" clId="{11D13D3E-C88F-41F9-9524-E8908C59F562}" dt="2025-12-13T16:28:10.566" v="1298" actId="1076"/>
           <ac:picMkLst>
             <pc:docMk/>
             <pc:sldMk cId="2785847948" sldId="271"/>
@@ -380,7 +381,7 @@
           </ac:picMkLst>
         </pc:picChg>
         <pc:picChg chg="add mod">
-          <ac:chgData name="Nishit M.V" userId="08cbca556c6700c9" providerId="LiveId" clId="{11D13D3E-C88F-41F9-9524-E8908C59F562}" dt="2025-12-12T13:30:38.553" v="1161" actId="1076"/>
+          <ac:chgData name="Nishit M.V" userId="08cbca556c6700c9" providerId="LiveId" clId="{11D13D3E-C88F-41F9-9524-E8908C59F562}" dt="2025-12-13T16:28:12.734" v="1299" actId="1076"/>
           <ac:picMkLst>
             <pc:docMk/>
             <pc:sldMk cId="2785847948" sldId="271"/>
@@ -418,6 +419,29 @@
             <ac:picMk id="5" creationId="{250B1070-9BFD-4B2F-2EF2-3560F8B7E571}"/>
           </ac:picMkLst>
         </pc:picChg>
+      </pc:sldChg>
+      <pc:sldChg chg="modSp new mod ord">
+        <pc:chgData name="Nishit M.V" userId="08cbca556c6700c9" providerId="LiveId" clId="{11D13D3E-C88F-41F9-9524-E8908C59F562}" dt="2025-12-13T17:11:00.900" v="1804" actId="20577"/>
+        <pc:sldMkLst>
+          <pc:docMk/>
+          <pc:sldMk cId="595186247" sldId="273"/>
+        </pc:sldMkLst>
+        <pc:spChg chg="mod">
+          <ac:chgData name="Nishit M.V" userId="08cbca556c6700c9" providerId="LiveId" clId="{11D13D3E-C88F-41F9-9524-E8908C59F562}" dt="2025-12-13T17:11:00.900" v="1804" actId="20577"/>
+          <ac:spMkLst>
+            <pc:docMk/>
+            <pc:sldMk cId="595186247" sldId="273"/>
+            <ac:spMk id="2" creationId="{E647EB82-DD37-C584-E0A9-956779FB154D}"/>
+          </ac:spMkLst>
+        </pc:spChg>
+        <pc:spChg chg="mod">
+          <ac:chgData name="Nishit M.V" userId="08cbca556c6700c9" providerId="LiveId" clId="{11D13D3E-C88F-41F9-9524-E8908C59F562}" dt="2025-12-13T17:10:56.946" v="1795" actId="12"/>
+          <ac:spMkLst>
+            <pc:docMk/>
+            <pc:sldMk cId="595186247" sldId="273"/>
+            <ac:spMk id="3" creationId="{FE643609-E672-A76A-6C3A-73287A576FC9}"/>
+          </ac:spMkLst>
+        </pc:spChg>
       </pc:sldChg>
     </pc:docChg>
   </pc:docChgLst>
@@ -603,7 +627,7 @@
           <a:p>
             <a:fld id="{5BCAD085-E8A6-8845-BD4E-CB4CCA059FC4}" type="datetimeFigureOut">
               <a:rPr lang="en-US" smtClean="0"/>
-              <a:t>12/12/2025</a:t>
+              <a:t>12/13/2025</a:t>
             </a:fld>
             <a:endParaRPr lang="en-US"/>
           </a:p>
@@ -771,7 +795,7 @@
           <a:p>
             <a:fld id="{5BCAD085-E8A6-8845-BD4E-CB4CCA059FC4}" type="datetimeFigureOut">
               <a:rPr lang="en-US" smtClean="0"/>
-              <a:t>12/12/2025</a:t>
+              <a:t>12/13/2025</a:t>
             </a:fld>
             <a:endParaRPr lang="en-US"/>
           </a:p>
@@ -949,7 +973,7 @@
           <a:p>
             <a:fld id="{5BCAD085-E8A6-8845-BD4E-CB4CCA059FC4}" type="datetimeFigureOut">
               <a:rPr lang="en-US" smtClean="0"/>
-              <a:t>12/12/2025</a:t>
+              <a:t>12/13/2025</a:t>
             </a:fld>
             <a:endParaRPr lang="en-US"/>
           </a:p>
@@ -1117,7 +1141,7 @@
           <a:p>
             <a:fld id="{5BCAD085-E8A6-8845-BD4E-CB4CCA059FC4}" type="datetimeFigureOut">
               <a:rPr lang="en-US" smtClean="0"/>
-              <a:t>12/12/2025</a:t>
+              <a:t>12/13/2025</a:t>
             </a:fld>
             <a:endParaRPr lang="en-US"/>
           </a:p>
@@ -1362,7 +1386,7 @@
           <a:p>
             <a:fld id="{5BCAD085-E8A6-8845-BD4E-CB4CCA059FC4}" type="datetimeFigureOut">
               <a:rPr lang="en-US" smtClean="0"/>
-              <a:t>12/12/2025</a:t>
+              <a:t>12/13/2025</a:t>
             </a:fld>
             <a:endParaRPr lang="en-US"/>
           </a:p>
@@ -1647,7 +1671,7 @@
           <a:p>
             <a:fld id="{5BCAD085-E8A6-8845-BD4E-CB4CCA059FC4}" type="datetimeFigureOut">
               <a:rPr lang="en-US" smtClean="0"/>
-              <a:t>12/12/2025</a:t>
+              <a:t>12/13/2025</a:t>
             </a:fld>
             <a:endParaRPr lang="en-US"/>
           </a:p>
@@ -2066,7 +2090,7 @@
           <a:p>
             <a:fld id="{5BCAD085-E8A6-8845-BD4E-CB4CCA059FC4}" type="datetimeFigureOut">
               <a:rPr lang="en-US" smtClean="0"/>
-              <a:t>12/12/2025</a:t>
+              <a:t>12/13/2025</a:t>
             </a:fld>
             <a:endParaRPr lang="en-US"/>
           </a:p>
@@ -2183,7 +2207,7 @@
           <a:p>
             <a:fld id="{5BCAD085-E8A6-8845-BD4E-CB4CCA059FC4}" type="datetimeFigureOut">
               <a:rPr lang="en-US" smtClean="0"/>
-              <a:t>12/12/2025</a:t>
+              <a:t>12/13/2025</a:t>
             </a:fld>
             <a:endParaRPr lang="en-US"/>
           </a:p>
@@ -2278,7 +2302,7 @@
           <a:p>
             <a:fld id="{5BCAD085-E8A6-8845-BD4E-CB4CCA059FC4}" type="datetimeFigureOut">
               <a:rPr lang="en-US" smtClean="0"/>
-              <a:t>12/12/2025</a:t>
+              <a:t>12/13/2025</a:t>
             </a:fld>
             <a:endParaRPr lang="en-US"/>
           </a:p>
@@ -2553,7 +2577,7 @@
           <a:p>
             <a:fld id="{5BCAD085-E8A6-8845-BD4E-CB4CCA059FC4}" type="datetimeFigureOut">
               <a:rPr lang="en-US" smtClean="0"/>
-              <a:t>12/12/2025</a:t>
+              <a:t>12/13/2025</a:t>
             </a:fld>
             <a:endParaRPr lang="en-US"/>
           </a:p>
@@ -2805,7 +2829,7 @@
           <a:p>
             <a:fld id="{5BCAD085-E8A6-8845-BD4E-CB4CCA059FC4}" type="datetimeFigureOut">
               <a:rPr lang="en-US" smtClean="0"/>
-              <a:t>12/12/2025</a:t>
+              <a:t>12/13/2025</a:t>
             </a:fld>
             <a:endParaRPr lang="en-US"/>
           </a:p>
@@ -3016,7 +3040,7 @@
           <a:p>
             <a:fld id="{5BCAD085-E8A6-8845-BD4E-CB4CCA059FC4}" type="datetimeFigureOut">
               <a:rPr lang="en-US" smtClean="0"/>
-              <a:t>12/12/2025</a:t>
+              <a:t>12/13/2025</a:t>
             </a:fld>
             <a:endParaRPr lang="en-US"/>
           </a:p>
@@ -4157,6 +4181,65 @@
           <a:chExt cx="0" cy="0"/>
         </a:xfrm>
       </p:grpSpPr>
+      <p:pic>
+        <p:nvPicPr>
+          <p:cNvPr id="5" name="Content Placeholder 4" descr="A collage of images of animals and cars&#10;&#10;AI-generated content may be incorrect.">
+            <a:extLst>
+              <a:ext uri="{FF2B5EF4-FFF2-40B4-BE49-F238E27FC236}">
+                <a16:creationId xmlns:a16="http://schemas.microsoft.com/office/drawing/2014/main" id="{250B1070-9BFD-4B2F-2EF2-3560F8B7E571}"/>
+              </a:ext>
+            </a:extLst>
+          </p:cNvPr>
+          <p:cNvPicPr>
+            <a:picLocks noGrp="1" noChangeAspect="1"/>
+          </p:cNvPicPr>
+          <p:nvPr>
+            <p:ph idx="1"/>
+          </p:nvPr>
+        </p:nvPicPr>
+        <p:blipFill>
+          <a:blip r:embed="rId2"/>
+          <a:stretch>
+            <a:fillRect/>
+          </a:stretch>
+        </p:blipFill>
+        <p:spPr>
+          <a:xfrm>
+            <a:off x="1544430" y="953729"/>
+            <a:ext cx="5704128" cy="5752537"/>
+          </a:xfrm>
+        </p:spPr>
+      </p:pic>
+    </p:spTree>
+    <p:extLst>
+      <p:ext uri="{BB962C8B-B14F-4D97-AF65-F5344CB8AC3E}">
+        <p14:creationId xmlns:p14="http://schemas.microsoft.com/office/powerpoint/2010/main" val="2828087024"/>
+      </p:ext>
+    </p:extLst>
+  </p:cSld>
+  <p:clrMapOvr>
+    <a:masterClrMapping/>
+  </p:clrMapOvr>
+</p:sld>
+</file>
+
+<file path=ppt/slides/slide11.xml><?xml version="1.0" encoding="utf-8"?>
+<p:sld xmlns:a="http://schemas.openxmlformats.org/drawingml/2006/main" xmlns:r="http://schemas.openxmlformats.org/officeDocument/2006/relationships" xmlns:p="http://schemas.openxmlformats.org/presentationml/2006/main">
+  <p:cSld>
+    <p:spTree>
+      <p:nvGrpSpPr>
+        <p:cNvPr id="1" name=""/>
+        <p:cNvGrpSpPr/>
+        <p:nvPr/>
+      </p:nvGrpSpPr>
+      <p:grpSpPr>
+        <a:xfrm>
+          <a:off x="0" y="0"/>
+          <a:ext cx="0" cy="0"/>
+          <a:chOff x="0" y="0"/>
+          <a:chExt cx="0" cy="0"/>
+        </a:xfrm>
+      </p:grpSpPr>
       <p:sp>
         <p:nvSpPr>
           <p:cNvPr id="2" name="Title 1">
@@ -4469,7 +4552,7 @@
 </p:sld>
 </file>
 
-<file path=ppt/slides/slide11.xml><?xml version="1.0" encoding="utf-8"?>
+<file path=ppt/slides/slide12.xml><?xml version="1.0" encoding="utf-8"?>
 <p:sld xmlns:a="http://schemas.openxmlformats.org/drawingml/2006/main" xmlns:r="http://schemas.openxmlformats.org/officeDocument/2006/relationships" xmlns:p="http://schemas.openxmlformats.org/presentationml/2006/main">
   <p:cSld>
     <p:spTree>
@@ -5031,7 +5114,7 @@
 </p:sld>
 </file>
 
-<file path=ppt/slides/slide12.xml><?xml version="1.0" encoding="utf-8"?>
+<file path=ppt/slides/slide13.xml><?xml version="1.0" encoding="utf-8"?>
 <p:sld xmlns:a="http://schemas.openxmlformats.org/drawingml/2006/main" xmlns:r="http://schemas.openxmlformats.org/officeDocument/2006/relationships" xmlns:p="http://schemas.openxmlformats.org/presentationml/2006/main">
   <p:cSld>
     <p:spTree>
@@ -5264,7 +5347,7 @@
 </p:sld>
 </file>
 
-<file path=ppt/slides/slide13.xml><?xml version="1.0" encoding="utf-8"?>
+<file path=ppt/slides/slide14.xml><?xml version="1.0" encoding="utf-8"?>
 <p:sld xmlns:a="http://schemas.openxmlformats.org/drawingml/2006/main" xmlns:r="http://schemas.openxmlformats.org/officeDocument/2006/relationships" xmlns:p="http://schemas.openxmlformats.org/presentationml/2006/main">
   <p:cSld>
     <p:spTree>
@@ -5659,7 +5742,7 @@
 </p:sld>
 </file>
 
-<file path=ppt/slides/slide14.xml><?xml version="1.0" encoding="utf-8"?>
+<file path=ppt/slides/slide15.xml><?xml version="1.0" encoding="utf-8"?>
 <p:sld xmlns:a="http://schemas.openxmlformats.org/drawingml/2006/main" xmlns:r="http://schemas.openxmlformats.org/officeDocument/2006/relationships" xmlns:p="http://schemas.openxmlformats.org/presentationml/2006/main">
   <p:cSld>
     <p:spTree>
@@ -5730,7 +5813,7 @@
           <a:p>
             <a:r>
               <a:rPr lang="en-GB" sz="1800" dirty="0"/>
-              <a:t>Setting Stride for K and V to 2 in the CNN 2D makes training faster but at a cost of 1% accuracy ( 88% vs 91% for K =V =1)</a:t>
+              <a:t>Setting Stride for K and V to 2 in the CNN 2D makes training faster but at a cost of 1% accuracy ( 88% vs 89% for K =V =1 , CLS Token used) </a:t>
             </a:r>
           </a:p>
           <a:p>
@@ -5774,7 +5857,19 @@
           <a:p>
             <a:r>
               <a:rPr lang="en-GB" sz="1800" dirty="0"/>
-              <a:t>Maximum possible accuracy for Cifar10 dataset observed to be 91% with GAP instead of Class Token</a:t>
+              <a:t>Maximum possible accuracy for Cifar10 dataset observed to be 91% with GAP(Global Average Pooling) instead of Class Token</a:t>
+            </a:r>
+          </a:p>
+          <a:p>
+            <a:r>
+              <a:rPr lang="en-GB" sz="1800" dirty="0"/>
+              <a:t>GAP forces a consensus from all spatial features, which aligns better with the convolutional inductive bias for CVT.</a:t>
+            </a:r>
+          </a:p>
+          <a:p>
+            <a:r>
+              <a:rPr lang="en-GB" sz="1800" dirty="0"/>
+              <a:t>Positional Embedding did not have an impact on the accuracy with Class Token . </a:t>
             </a:r>
             <a:endParaRPr lang="en-IN" sz="1800" dirty="0"/>
           </a:p>
@@ -5793,7 +5888,7 @@
 </p:sld>
 </file>
 
-<file path=ppt/slides/slide15.xml><?xml version="1.0" encoding="utf-8"?>
+<file path=ppt/slides/slide16.xml><?xml version="1.0" encoding="utf-8"?>
 <p:sld xmlns:a="http://schemas.openxmlformats.org/drawingml/2006/main" xmlns:r="http://schemas.openxmlformats.org/officeDocument/2006/relationships" xmlns:p="http://schemas.openxmlformats.org/presentationml/2006/main">
   <p:cSld>
     <p:spTree>
@@ -6723,6 +6818,122 @@
       </p:grpSpPr>
       <p:sp>
         <p:nvSpPr>
+          <p:cNvPr id="2" name="Title 1">
+            <a:extLst>
+              <a:ext uri="{FF2B5EF4-FFF2-40B4-BE49-F238E27FC236}">
+                <a16:creationId xmlns:a16="http://schemas.microsoft.com/office/drawing/2014/main" id="{E647EB82-DD37-C584-E0A9-956779FB154D}"/>
+              </a:ext>
+            </a:extLst>
+          </p:cNvPr>
+          <p:cNvSpPr>
+            <a:spLocks noGrp="1"/>
+          </p:cNvSpPr>
+          <p:nvPr>
+            <p:ph type="title"/>
+          </p:nvPr>
+        </p:nvSpPr>
+        <p:spPr/>
+        <p:txBody>
+          <a:bodyPr/>
+          <a:lstStyle/>
+          <a:p>
+            <a:r>
+              <a:rPr lang="en-GB" dirty="0"/>
+              <a:t>Experiments with CVT</a:t>
+            </a:r>
+            <a:endParaRPr lang="en-IN" dirty="0"/>
+          </a:p>
+        </p:txBody>
+      </p:sp>
+      <p:sp>
+        <p:nvSpPr>
+          <p:cNvPr id="3" name="Content Placeholder 2">
+            <a:extLst>
+              <a:ext uri="{FF2B5EF4-FFF2-40B4-BE49-F238E27FC236}">
+                <a16:creationId xmlns:a16="http://schemas.microsoft.com/office/drawing/2014/main" id="{FE643609-E672-A76A-6C3A-73287A576FC9}"/>
+              </a:ext>
+            </a:extLst>
+          </p:cNvPr>
+          <p:cNvSpPr>
+            <a:spLocks noGrp="1"/>
+          </p:cNvSpPr>
+          <p:nvPr>
+            <p:ph idx="1"/>
+          </p:nvPr>
+        </p:nvSpPr>
+        <p:spPr/>
+        <p:txBody>
+          <a:bodyPr>
+            <a:normAutofit/>
+          </a:bodyPr>
+          <a:lstStyle/>
+          <a:p>
+            <a:r>
+              <a:rPr lang="en-GB" sz="1800" dirty="0"/>
+              <a:t>Transformations to improve accuracy ( Random Augment) </a:t>
+            </a:r>
+          </a:p>
+          <a:p>
+            <a:r>
+              <a:rPr lang="en-GB" sz="1800" dirty="0"/>
+              <a:t>Change of Optimizer</a:t>
+            </a:r>
+          </a:p>
+          <a:p>
+            <a:r>
+              <a:rPr lang="en-GB" sz="1800" dirty="0"/>
+              <a:t>Positional Embedding vs Class Token vs Global Average Pooling</a:t>
+            </a:r>
+          </a:p>
+          <a:p>
+            <a:r>
+              <a:rPr lang="en-GB" sz="1800" dirty="0"/>
+              <a:t>Warmup, Scheduling &amp; Weight Decay</a:t>
+            </a:r>
+          </a:p>
+          <a:p>
+            <a:r>
+              <a:rPr lang="en-GB" sz="1800" dirty="0"/>
+              <a:t>Stride changes for K and V in Convolutional Block in CVT </a:t>
+            </a:r>
+          </a:p>
+          <a:p>
+            <a:endParaRPr lang="en-IN" sz="1800" dirty="0"/>
+          </a:p>
+        </p:txBody>
+      </p:sp>
+    </p:spTree>
+    <p:extLst>
+      <p:ext uri="{BB962C8B-B14F-4D97-AF65-F5344CB8AC3E}">
+        <p14:creationId xmlns:p14="http://schemas.microsoft.com/office/powerpoint/2010/main" val="595186247"/>
+      </p:ext>
+    </p:extLst>
+  </p:cSld>
+  <p:clrMapOvr>
+    <a:masterClrMapping/>
+  </p:clrMapOvr>
+</p:sld>
+</file>
+
+<file path=ppt/slides/slide6.xml><?xml version="1.0" encoding="utf-8"?>
+<p:sld xmlns:a="http://schemas.openxmlformats.org/drawingml/2006/main" xmlns:r="http://schemas.openxmlformats.org/officeDocument/2006/relationships" xmlns:p="http://schemas.openxmlformats.org/presentationml/2006/main">
+  <p:cSld>
+    <p:spTree>
+      <p:nvGrpSpPr>
+        <p:cNvPr id="1" name=""/>
+        <p:cNvGrpSpPr/>
+        <p:nvPr/>
+      </p:nvGrpSpPr>
+      <p:grpSpPr>
+        <a:xfrm>
+          <a:off x="0" y="0"/>
+          <a:ext cx="0" cy="0"/>
+          <a:chOff x="0" y="0"/>
+          <a:chExt cx="0" cy="0"/>
+        </a:xfrm>
+      </p:grpSpPr>
+      <p:sp>
+        <p:nvSpPr>
           <p:cNvPr id="17" name="Rectangle: Rounded Corners 16">
             <a:extLst>
               <a:ext uri="{FF2B5EF4-FFF2-40B4-BE49-F238E27FC236}">
@@ -7613,7 +7824,7 @@
 </p:sld>
 </file>
 
-<file path=ppt/slides/slide6.xml><?xml version="1.0" encoding="utf-8"?>
+<file path=ppt/slides/slide7.xml><?xml version="1.0" encoding="utf-8"?>
 <p:sld xmlns:a="http://schemas.openxmlformats.org/drawingml/2006/main" xmlns:r="http://schemas.openxmlformats.org/officeDocument/2006/relationships" xmlns:p="http://schemas.openxmlformats.org/presentationml/2006/main">
   <p:cSld>
     <p:spTree>
@@ -7708,15 +7919,7 @@
             </a:r>
             <a:r>
               <a:rPr lang="en-GB" sz="1800" dirty="0"/>
-              <a:t>, decouples weight decay </a:t>
-            </a:r>
-            <a:r>
-              <a:rPr lang="en-GB" sz="1800"/>
-              <a:t>from gradient </a:t>
-            </a:r>
-            <a:r>
-              <a:rPr lang="en-GB" sz="1800" dirty="0"/>
-              <a:t>update</a:t>
+              <a:t>, decouples weight decay from gradient update</a:t>
             </a:r>
             <a:r>
               <a:rPr sz="1800" dirty="0"/>
@@ -7845,7 +8048,7 @@
 </p:sld>
 </file>
 
-<file path=ppt/slides/slide7.xml><?xml version="1.0" encoding="utf-8"?>
+<file path=ppt/slides/slide8.xml><?xml version="1.0" encoding="utf-8"?>
 <p:sld xmlns:a="http://schemas.openxmlformats.org/drawingml/2006/main" xmlns:r="http://schemas.openxmlformats.org/officeDocument/2006/relationships" xmlns:p="http://schemas.openxmlformats.org/presentationml/2006/main">
   <p:cSld>
     <p:spTree>
@@ -8382,7 +8585,7 @@
 </p:sld>
 </file>
 
-<file path=ppt/slides/slide8.xml><?xml version="1.0" encoding="utf-8"?>
+<file path=ppt/slides/slide9.xml><?xml version="1.0" encoding="utf-8"?>
 <p:sld xmlns:a="http://schemas.openxmlformats.org/drawingml/2006/main" xmlns:r="http://schemas.openxmlformats.org/officeDocument/2006/relationships" xmlns:p="http://schemas.openxmlformats.org/presentationml/2006/main">
   <p:cSld>
     <p:spTree>
@@ -8417,8 +8620,8 @@
         </p:nvSpPr>
         <p:spPr>
           <a:xfrm>
-            <a:off x="457200" y="274638"/>
-            <a:ext cx="8229600" cy="757749"/>
+            <a:off x="457200" y="619433"/>
+            <a:ext cx="8229600" cy="344794"/>
           </a:xfrm>
         </p:spPr>
         <p:txBody>
@@ -8429,7 +8632,7 @@
           <a:p>
             <a:r>
               <a:rPr lang="en-GB" dirty="0"/>
-              <a:t>Result CVT ( As per Paper with GAP)</a:t>
+              <a:t>Result CVT ( As per Paper with GAP &amp; no CLS Token)</a:t>
             </a:r>
             <a:endParaRPr lang="en-IN" dirty="0"/>
           </a:p>
@@ -8459,7 +8662,7 @@
         </p:blipFill>
         <p:spPr>
           <a:xfrm>
-            <a:off x="0" y="922338"/>
+            <a:off x="0" y="1610596"/>
             <a:ext cx="5246396" cy="3934797"/>
           </a:xfrm>
         </p:spPr>
@@ -8486,7 +8689,7 @@
         </p:blipFill>
         <p:spPr>
           <a:xfrm>
-            <a:off x="4733242" y="1032387"/>
+            <a:off x="4929887" y="1701543"/>
             <a:ext cx="4282939" cy="3752901"/>
           </a:xfrm>
           <a:prstGeom prst="rect">
@@ -8498,65 +8701,6 @@
     <p:extLst>
       <p:ext uri="{BB962C8B-B14F-4D97-AF65-F5344CB8AC3E}">
         <p14:creationId xmlns:p14="http://schemas.microsoft.com/office/powerpoint/2010/main" val="2785847948"/>
-      </p:ext>
-    </p:extLst>
-  </p:cSld>
-  <p:clrMapOvr>
-    <a:masterClrMapping/>
-  </p:clrMapOvr>
-</p:sld>
-</file>
-
-<file path=ppt/slides/slide9.xml><?xml version="1.0" encoding="utf-8"?>
-<p:sld xmlns:a="http://schemas.openxmlformats.org/drawingml/2006/main" xmlns:r="http://schemas.openxmlformats.org/officeDocument/2006/relationships" xmlns:p="http://schemas.openxmlformats.org/presentationml/2006/main">
-  <p:cSld>
-    <p:spTree>
-      <p:nvGrpSpPr>
-        <p:cNvPr id="1" name=""/>
-        <p:cNvGrpSpPr/>
-        <p:nvPr/>
-      </p:nvGrpSpPr>
-      <p:grpSpPr>
-        <a:xfrm>
-          <a:off x="0" y="0"/>
-          <a:ext cx="0" cy="0"/>
-          <a:chOff x="0" y="0"/>
-          <a:chExt cx="0" cy="0"/>
-        </a:xfrm>
-      </p:grpSpPr>
-      <p:pic>
-        <p:nvPicPr>
-          <p:cNvPr id="5" name="Content Placeholder 4" descr="A collage of images of animals and cars&#10;&#10;AI-generated content may be incorrect.">
-            <a:extLst>
-              <a:ext uri="{FF2B5EF4-FFF2-40B4-BE49-F238E27FC236}">
-                <a16:creationId xmlns:a16="http://schemas.microsoft.com/office/drawing/2014/main" id="{250B1070-9BFD-4B2F-2EF2-3560F8B7E571}"/>
-              </a:ext>
-            </a:extLst>
-          </p:cNvPr>
-          <p:cNvPicPr>
-            <a:picLocks noGrp="1" noChangeAspect="1"/>
-          </p:cNvPicPr>
-          <p:nvPr>
-            <p:ph idx="1"/>
-          </p:nvPr>
-        </p:nvPicPr>
-        <p:blipFill>
-          <a:blip r:embed="rId2"/>
-          <a:stretch>
-            <a:fillRect/>
-          </a:stretch>
-        </p:blipFill>
-        <p:spPr>
-          <a:xfrm>
-            <a:off x="1544430" y="953729"/>
-            <a:ext cx="5704128" cy="5752537"/>
-          </a:xfrm>
-        </p:spPr>
-      </p:pic>
-    </p:spTree>
-    <p:extLst>
-      <p:ext uri="{BB962C8B-B14F-4D97-AF65-F5344CB8AC3E}">
-        <p14:creationId xmlns:p14="http://schemas.microsoft.com/office/powerpoint/2010/main" val="2828087024"/>
       </p:ext>
     </p:extLst>
   </p:cSld>
